--- a/Operátorok.pptx
+++ b/Operátorok.pptx
@@ -113,6 +113,11 @@
       </a:defRPr>
     </a:lvl9pPr>
   </p:defaultTextStyle>
+  <p:extLst>
+    <p:ext uri="{EFAFB233-063F-42B5-8137-9DF3F51BA10A}">
+      <p15:sldGuideLst xmlns:p15="http://schemas.microsoft.com/office/powerpoint/2012/main"/>
+    </p:ext>
+  </p:extLst>
 </p:presentation>
 </file>
 
@@ -263,7 +268,7 @@
           <a:p>
             <a:fld id="{854B3CA0-2F5A-4BA3-86AF-AC97AE9DB680}" type="datetimeFigureOut">
               <a:rPr lang="hu-HU" smtClean="0"/>
-              <a:t>2026. 10. 01.</a:t>
+              <a:t>2026. 10. 08.</a:t>
             </a:fld>
             <a:endParaRPr lang="hu-HU"/>
           </a:p>
@@ -461,7 +466,7 @@
           <a:p>
             <a:fld id="{854B3CA0-2F5A-4BA3-86AF-AC97AE9DB680}" type="datetimeFigureOut">
               <a:rPr lang="hu-HU" smtClean="0"/>
-              <a:t>2026. 10. 01.</a:t>
+              <a:t>2026. 10. 08.</a:t>
             </a:fld>
             <a:endParaRPr lang="hu-HU"/>
           </a:p>
@@ -669,7 +674,7 @@
           <a:p>
             <a:fld id="{854B3CA0-2F5A-4BA3-86AF-AC97AE9DB680}" type="datetimeFigureOut">
               <a:rPr lang="hu-HU" smtClean="0"/>
-              <a:t>2026. 10. 01.</a:t>
+              <a:t>2026. 10. 08.</a:t>
             </a:fld>
             <a:endParaRPr lang="hu-HU"/>
           </a:p>
@@ -867,7 +872,7 @@
           <a:p>
             <a:fld id="{854B3CA0-2F5A-4BA3-86AF-AC97AE9DB680}" type="datetimeFigureOut">
               <a:rPr lang="hu-HU" smtClean="0"/>
-              <a:t>2026. 10. 01.</a:t>
+              <a:t>2026. 10. 08.</a:t>
             </a:fld>
             <a:endParaRPr lang="hu-HU"/>
           </a:p>
@@ -1142,7 +1147,7 @@
           <a:p>
             <a:fld id="{854B3CA0-2F5A-4BA3-86AF-AC97AE9DB680}" type="datetimeFigureOut">
               <a:rPr lang="hu-HU" smtClean="0"/>
-              <a:t>2026. 10. 01.</a:t>
+              <a:t>2026. 10. 08.</a:t>
             </a:fld>
             <a:endParaRPr lang="hu-HU"/>
           </a:p>
@@ -1407,7 +1412,7 @@
           <a:p>
             <a:fld id="{854B3CA0-2F5A-4BA3-86AF-AC97AE9DB680}" type="datetimeFigureOut">
               <a:rPr lang="hu-HU" smtClean="0"/>
-              <a:t>2026. 10. 01.</a:t>
+              <a:t>2026. 10. 08.</a:t>
             </a:fld>
             <a:endParaRPr lang="hu-HU"/>
           </a:p>
@@ -1819,7 +1824,7 @@
           <a:p>
             <a:fld id="{854B3CA0-2F5A-4BA3-86AF-AC97AE9DB680}" type="datetimeFigureOut">
               <a:rPr lang="hu-HU" smtClean="0"/>
-              <a:t>2026. 10. 01.</a:t>
+              <a:t>2026. 10. 08.</a:t>
             </a:fld>
             <a:endParaRPr lang="hu-HU"/>
           </a:p>
@@ -1960,7 +1965,7 @@
           <a:p>
             <a:fld id="{854B3CA0-2F5A-4BA3-86AF-AC97AE9DB680}" type="datetimeFigureOut">
               <a:rPr lang="hu-HU" smtClean="0"/>
-              <a:t>2026. 10. 01.</a:t>
+              <a:t>2026. 10. 08.</a:t>
             </a:fld>
             <a:endParaRPr lang="hu-HU"/>
           </a:p>
@@ -2073,7 +2078,7 @@
           <a:p>
             <a:fld id="{854B3CA0-2F5A-4BA3-86AF-AC97AE9DB680}" type="datetimeFigureOut">
               <a:rPr lang="hu-HU" smtClean="0"/>
-              <a:t>2026. 10. 01.</a:t>
+              <a:t>2026. 10. 08.</a:t>
             </a:fld>
             <a:endParaRPr lang="hu-HU"/>
           </a:p>
@@ -2384,7 +2389,7 @@
           <a:p>
             <a:fld id="{854B3CA0-2F5A-4BA3-86AF-AC97AE9DB680}" type="datetimeFigureOut">
               <a:rPr lang="hu-HU" smtClean="0"/>
-              <a:t>2026. 10. 01.</a:t>
+              <a:t>2026. 10. 08.</a:t>
             </a:fld>
             <a:endParaRPr lang="hu-HU"/>
           </a:p>
@@ -2672,7 +2677,7 @@
           <a:p>
             <a:fld id="{854B3CA0-2F5A-4BA3-86AF-AC97AE9DB680}" type="datetimeFigureOut">
               <a:rPr lang="hu-HU" smtClean="0"/>
-              <a:t>2026. 10. 01.</a:t>
+              <a:t>2026. 10. 08.</a:t>
             </a:fld>
             <a:endParaRPr lang="hu-HU"/>
           </a:p>
@@ -2885,7 +2890,7 @@
           <a:p>
             <a:fld id="{854B3CA0-2F5A-4BA3-86AF-AC97AE9DB680}" type="datetimeFigureOut">
               <a:rPr lang="hu-HU" smtClean="0"/>
-              <a:t>2026. 10. 01.</a:t>
+              <a:t>2026. 10. 08.</a:t>
             </a:fld>
             <a:endParaRPr lang="hu-HU"/>
           </a:p>
@@ -3414,31 +3419,113 @@
           </a:p>
         </p:txBody>
       </p:sp>
-      <p:sp>
-        <p:nvSpPr>
-          <p:cNvPr id="3" name="Tartalom helye 2">
-            <a:extLst>
-              <a:ext uri="{FF2B5EF4-FFF2-40B4-BE49-F238E27FC236}">
-                <a16:creationId xmlns:a16="http://schemas.microsoft.com/office/drawing/2014/main" id="{C556FA47-5E2A-4343-8DB6-71957F263CB7}"/>
-              </a:ext>
-            </a:extLst>
-          </p:cNvPr>
-          <p:cNvSpPr>
-            <a:spLocks noGrp="1"/>
-          </p:cNvSpPr>
+      <p:pic>
+        <p:nvPicPr>
+          <p:cNvPr id="5" name="Tartalom helye 4">
+            <a:extLst>
+              <a:ext uri="{FF2B5EF4-FFF2-40B4-BE49-F238E27FC236}">
+                <a16:creationId xmlns:a16="http://schemas.microsoft.com/office/drawing/2014/main" id="{E0E5E8E7-1367-4C2D-9F0C-0F39A92A625C}"/>
+              </a:ext>
+            </a:extLst>
+          </p:cNvPr>
+          <p:cNvPicPr>
+            <a:picLocks noGrp="1" noChangeAspect="1"/>
+          </p:cNvPicPr>
           <p:nvPr>
             <p:ph idx="1"/>
           </p:nvPr>
-        </p:nvSpPr>
-        <p:spPr/>
-        <p:txBody>
-          <a:bodyPr/>
-          <a:lstStyle/>
-          <a:p>
-            <a:endParaRPr lang="hu-HU"/>
-          </a:p>
-        </p:txBody>
-      </p:sp>
+        </p:nvPicPr>
+        <p:blipFill>
+          <a:blip r:embed="rId2">
+            <a:extLst>
+              <a:ext uri="{28A0092B-C50C-407E-A947-70E740481C1C}">
+                <a14:useLocalDpi xmlns:a14="http://schemas.microsoft.com/office/drawing/2010/main" val="0"/>
+              </a:ext>
+            </a:extLst>
+          </a:blip>
+          <a:stretch>
+            <a:fillRect/>
+          </a:stretch>
+        </p:blipFill>
+        <p:spPr>
+          <a:xfrm>
+            <a:off x="4682827" y="1286673"/>
+            <a:ext cx="6857389" cy="1552906"/>
+          </a:xfrm>
+        </p:spPr>
+      </p:pic>
+      <p:pic>
+        <p:nvPicPr>
+          <p:cNvPr id="7" name="Kép 6">
+            <a:extLst>
+              <a:ext uri="{FF2B5EF4-FFF2-40B4-BE49-F238E27FC236}">
+                <a16:creationId xmlns:a16="http://schemas.microsoft.com/office/drawing/2014/main" id="{40147A01-46BA-4842-A5F4-917A657A9097}"/>
+              </a:ext>
+            </a:extLst>
+          </p:cNvPr>
+          <p:cNvPicPr>
+            <a:picLocks noChangeAspect="1"/>
+          </p:cNvPicPr>
+          <p:nvPr/>
+        </p:nvPicPr>
+        <p:blipFill>
+          <a:blip r:embed="rId3">
+            <a:extLst>
+              <a:ext uri="{28A0092B-C50C-407E-A947-70E740481C1C}">
+                <a14:useLocalDpi xmlns:a14="http://schemas.microsoft.com/office/drawing/2010/main" val="0"/>
+              </a:ext>
+            </a:extLst>
+          </a:blip>
+          <a:stretch>
+            <a:fillRect/>
+          </a:stretch>
+        </p:blipFill>
+        <p:spPr>
+          <a:xfrm>
+            <a:off x="211915" y="3246165"/>
+            <a:ext cx="6163486" cy="1544514"/>
+          </a:xfrm>
+          <a:prstGeom prst="rect">
+            <a:avLst/>
+          </a:prstGeom>
+        </p:spPr>
+      </p:pic>
+      <p:pic>
+        <p:nvPicPr>
+          <p:cNvPr id="9" name="Kép 8">
+            <a:extLst>
+              <a:ext uri="{FF2B5EF4-FFF2-40B4-BE49-F238E27FC236}">
+                <a16:creationId xmlns:a16="http://schemas.microsoft.com/office/drawing/2014/main" id="{995750D6-10DF-43E5-9321-3DBC9D4C421A}"/>
+              </a:ext>
+            </a:extLst>
+          </p:cNvPr>
+          <p:cNvPicPr>
+            <a:picLocks noChangeAspect="1"/>
+          </p:cNvPicPr>
+          <p:nvPr/>
+        </p:nvPicPr>
+        <p:blipFill>
+          <a:blip r:embed="rId4">
+            <a:extLst>
+              <a:ext uri="{28A0092B-C50C-407E-A947-70E740481C1C}">
+                <a14:useLocalDpi xmlns:a14="http://schemas.microsoft.com/office/drawing/2010/main" val="0"/>
+              </a:ext>
+            </a:extLst>
+          </a:blip>
+          <a:stretch>
+            <a:fillRect/>
+          </a:stretch>
+        </p:blipFill>
+        <p:spPr>
+          <a:xfrm>
+            <a:off x="6629401" y="4314755"/>
+            <a:ext cx="5207000" cy="2118403"/>
+          </a:xfrm>
+          <a:prstGeom prst="rect">
+            <a:avLst/>
+          </a:prstGeom>
+        </p:spPr>
+      </p:pic>
     </p:spTree>
     <p:extLst>
       <p:ext uri="{BB962C8B-B14F-4D97-AF65-F5344CB8AC3E}">
@@ -3487,38 +3574,15 @@
         </p:nvSpPr>
         <p:spPr/>
         <p:txBody>
-          <a:bodyPr/>
-          <a:lstStyle/>
-          <a:p>
-            <a:r>
-              <a:rPr lang="hu-HU" b="1" dirty="0"/>
+          <a:bodyPr>
+            <a:normAutofit/>
+          </a:bodyPr>
+          <a:lstStyle/>
+          <a:p>
+            <a:r>
+              <a:rPr lang="hu-HU" sz="6000" b="1" dirty="0"/>
               <a:t>Menü:</a:t>
             </a:r>
-          </a:p>
-        </p:txBody>
-      </p:sp>
-      <p:sp>
-        <p:nvSpPr>
-          <p:cNvPr id="3" name="Tartalom helye 2">
-            <a:extLst>
-              <a:ext uri="{FF2B5EF4-FFF2-40B4-BE49-F238E27FC236}">
-                <a16:creationId xmlns:a16="http://schemas.microsoft.com/office/drawing/2014/main" id="{2B18E8A8-19A1-49F3-9A8D-E9FEC4426B6D}"/>
-              </a:ext>
-            </a:extLst>
-          </p:cNvPr>
-          <p:cNvSpPr>
-            <a:spLocks noGrp="1"/>
-          </p:cNvSpPr>
-          <p:nvPr>
-            <p:ph idx="1"/>
-          </p:nvPr>
-        </p:nvSpPr>
-        <p:spPr/>
-        <p:txBody>
-          <a:bodyPr/>
-          <a:lstStyle/>
-          <a:p>
-            <a:endParaRPr lang="hu-HU" dirty="0"/>
           </a:p>
         </p:txBody>
       </p:sp>
@@ -3545,7 +3609,7 @@
         </p:blipFill>
         <p:spPr>
           <a:xfrm>
-            <a:off x="1921505" y="3800582"/>
+            <a:off x="1322155" y="4231468"/>
             <a:ext cx="613355" cy="613355"/>
           </a:xfrm>
           <a:prstGeom prst="rect">
@@ -3567,8 +3631,8 @@
         </p:nvSpPr>
         <p:spPr>
           <a:xfrm>
-            <a:off x="1668545" y="3400719"/>
-            <a:ext cx="1319752" cy="369332"/>
+            <a:off x="722623" y="3493462"/>
+            <a:ext cx="2026242" cy="553998"/>
           </a:xfrm>
           <a:prstGeom prst="rect">
             <a:avLst/>
@@ -3582,9 +3646,12 @@
           <a:lstStyle/>
           <a:p>
             <a:r>
-              <a:rPr lang="hu-HU" b="1" dirty="0"/>
+              <a:rPr lang="hu-HU" sz="3000" b="1" dirty="0">
+                <a:hlinkClick r:id="rId2" action="ppaction://hlinksldjump"/>
+              </a:rPr>
               <a:t>Aritmetikai</a:t>
             </a:r>
+            <a:endParaRPr lang="hu-HU" sz="3000" b="1" dirty="0"/>
           </a:p>
         </p:txBody>
       </p:sp>
@@ -3602,8 +3669,8 @@
         </p:nvSpPr>
         <p:spPr>
           <a:xfrm>
-            <a:off x="8589263" y="2228379"/>
-            <a:ext cx="1039836" cy="369332"/>
+            <a:off x="6992307" y="3467314"/>
+            <a:ext cx="1728359" cy="553998"/>
           </a:xfrm>
           <a:prstGeom prst="rect">
             <a:avLst/>
@@ -3611,15 +3678,18 @@
           <a:noFill/>
         </p:spPr>
         <p:txBody>
-          <a:bodyPr wrap="none" rtlCol="0">
+          <a:bodyPr wrap="square" rtlCol="0">
             <a:spAutoFit/>
           </a:bodyPr>
           <a:lstStyle/>
           <a:p>
             <a:r>
-              <a:rPr lang="hu-HU" b="1" dirty="0"/>
+              <a:rPr lang="hu-HU" sz="3000" b="1" dirty="0">
+                <a:hlinkClick r:id="rId4" action="ppaction://hlinksldjump"/>
+              </a:rPr>
               <a:t>Értékadó</a:t>
             </a:r>
+            <a:endParaRPr lang="hu-HU" sz="3000" b="1" dirty="0"/>
           </a:p>
         </p:txBody>
       </p:sp>
@@ -3637,7 +3707,81 @@
         </p:nvSpPr>
         <p:spPr>
           <a:xfrm>
-            <a:off x="8825289" y="2347349"/>
+            <a:off x="7431816" y="3770461"/>
+            <a:ext cx="713873" cy="1323439"/>
+          </a:xfrm>
+          <a:prstGeom prst="rect">
+            <a:avLst/>
+          </a:prstGeom>
+          <a:noFill/>
+        </p:spPr>
+        <p:txBody>
+          <a:bodyPr wrap="square" rtlCol="0">
+            <a:spAutoFit/>
+          </a:bodyPr>
+          <a:lstStyle/>
+          <a:p>
+            <a:r>
+              <a:rPr lang="hu-HU" sz="8000" b="1" dirty="0"/>
+              <a:t>=</a:t>
+            </a:r>
+            <a:endParaRPr lang="hu-HU" sz="8000" dirty="0"/>
+          </a:p>
+        </p:txBody>
+      </p:sp>
+      <p:sp>
+        <p:nvSpPr>
+          <p:cNvPr id="8" name="Szövegdoboz 7">
+            <a:extLst>
+              <a:ext uri="{FF2B5EF4-FFF2-40B4-BE49-F238E27FC236}">
+                <a16:creationId xmlns:a16="http://schemas.microsoft.com/office/drawing/2014/main" id="{445685B1-BABA-4A1F-8932-3176AF57F22A}"/>
+              </a:ext>
+            </a:extLst>
+          </p:cNvPr>
+          <p:cNvSpPr txBox="1"/>
+          <p:nvPr/>
+        </p:nvSpPr>
+        <p:spPr>
+          <a:xfrm>
+            <a:off x="2579202" y="2826348"/>
+            <a:ext cx="4225449" cy="553998"/>
+          </a:xfrm>
+          <a:prstGeom prst="rect">
+            <a:avLst/>
+          </a:prstGeom>
+          <a:noFill/>
+        </p:spPr>
+        <p:txBody>
+          <a:bodyPr wrap="square" rtlCol="0">
+            <a:spAutoFit/>
+          </a:bodyPr>
+          <a:lstStyle/>
+          <a:p>
+            <a:r>
+              <a:rPr lang="hu-HU" sz="3000" b="1" dirty="0">
+                <a:hlinkClick r:id="rId5" action="ppaction://hlinksldjump"/>
+              </a:rPr>
+              <a:t>Relációs(összehasonlító)</a:t>
+            </a:r>
+            <a:endParaRPr lang="hu-HU" sz="3000" b="1" dirty="0"/>
+          </a:p>
+        </p:txBody>
+      </p:sp>
+      <p:sp>
+        <p:nvSpPr>
+          <p:cNvPr id="9" name="Szövegdoboz 8">
+            <a:extLst>
+              <a:ext uri="{FF2B5EF4-FFF2-40B4-BE49-F238E27FC236}">
+                <a16:creationId xmlns:a16="http://schemas.microsoft.com/office/drawing/2014/main" id="{431D78CB-07E8-423C-8F07-33AAE76F804C}"/>
+              </a:ext>
+            </a:extLst>
+          </p:cNvPr>
+          <p:cNvSpPr txBox="1"/>
+          <p:nvPr/>
+        </p:nvSpPr>
+        <p:spPr>
+          <a:xfrm>
+            <a:off x="4307294" y="3213660"/>
             <a:ext cx="567784" cy="1015663"/>
           </a:xfrm>
           <a:prstGeom prst="rect">
@@ -3646,27 +3790,24 @@
           <a:noFill/>
         </p:spPr>
         <p:txBody>
-          <a:bodyPr wrap="none" rtlCol="0">
+          <a:bodyPr wrap="square" rtlCol="0">
             <a:spAutoFit/>
           </a:bodyPr>
           <a:lstStyle/>
           <a:p>
             <a:r>
-              <a:rPr lang="hu-HU" sz="6000" b="1" dirty="0">
-                <a:hlinkClick r:id="rId4" action="ppaction://hlinksldjump"/>
-              </a:rPr>
-              <a:t>=</a:t>
-            </a:r>
-            <a:endParaRPr lang="hu-HU" sz="6000" dirty="0"/>
-          </a:p>
-        </p:txBody>
-      </p:sp>
-      <p:sp>
-        <p:nvSpPr>
-          <p:cNvPr id="8" name="Szövegdoboz 7">
-            <a:extLst>
-              <a:ext uri="{FF2B5EF4-FFF2-40B4-BE49-F238E27FC236}">
-                <a16:creationId xmlns:a16="http://schemas.microsoft.com/office/drawing/2014/main" id="{445685B1-BABA-4A1F-8932-3176AF57F22A}"/>
+              <a:rPr lang="hu-HU" sz="6000" b="1" dirty="0"/>
+              <a:t>&lt;</a:t>
+            </a:r>
+          </a:p>
+        </p:txBody>
+      </p:sp>
+      <p:sp>
+        <p:nvSpPr>
+          <p:cNvPr id="10" name="Szövegdoboz 9">
+            <a:extLst>
+              <a:ext uri="{FF2B5EF4-FFF2-40B4-BE49-F238E27FC236}">
+                <a16:creationId xmlns:a16="http://schemas.microsoft.com/office/drawing/2014/main" id="{4BDD6F70-2569-4836-B970-ADCA6F5D01A2}"/>
               </a:ext>
             </a:extLst>
           </p:cNvPr>
@@ -3675,8 +3816,8 @@
         </p:nvSpPr>
         <p:spPr>
           <a:xfrm>
-            <a:off x="4572812" y="2889240"/>
-            <a:ext cx="2503827" cy="369332"/>
+            <a:off x="9656618" y="2826348"/>
+            <a:ext cx="1551694" cy="553998"/>
           </a:xfrm>
           <a:prstGeom prst="rect">
             <a:avLst/>
@@ -3684,24 +3825,27 @@
           <a:noFill/>
         </p:spPr>
         <p:txBody>
-          <a:bodyPr wrap="none" rtlCol="0">
+          <a:bodyPr wrap="square" rtlCol="0">
             <a:spAutoFit/>
           </a:bodyPr>
           <a:lstStyle/>
           <a:p>
             <a:r>
-              <a:rPr lang="hu-HU" b="1" dirty="0"/>
-              <a:t>Relációs(összehasonlító)</a:t>
-            </a:r>
-          </a:p>
-        </p:txBody>
-      </p:sp>
-      <p:sp>
-        <p:nvSpPr>
-          <p:cNvPr id="9" name="Szövegdoboz 8">
-            <a:extLst>
-              <a:ext uri="{FF2B5EF4-FFF2-40B4-BE49-F238E27FC236}">
-                <a16:creationId xmlns:a16="http://schemas.microsoft.com/office/drawing/2014/main" id="{431D78CB-07E8-423C-8F07-33AAE76F804C}"/>
+              <a:rPr lang="hu-HU" sz="3000" b="1" dirty="0">
+                <a:hlinkClick r:id="rId6" action="ppaction://hlinksldjump"/>
+              </a:rPr>
+              <a:t>Logikai</a:t>
+            </a:r>
+            <a:endParaRPr lang="hu-HU" sz="3000" b="1" dirty="0"/>
+          </a:p>
+        </p:txBody>
+      </p:sp>
+      <p:sp>
+        <p:nvSpPr>
+          <p:cNvPr id="11" name="Szövegdoboz 10">
+            <a:extLst>
+              <a:ext uri="{FF2B5EF4-FFF2-40B4-BE49-F238E27FC236}">
+                <a16:creationId xmlns:a16="http://schemas.microsoft.com/office/drawing/2014/main" id="{31D1F507-54E2-4083-AF63-10388B0C62D0}"/>
               </a:ext>
             </a:extLst>
           </p:cNvPr>
@@ -3710,80 +3854,7 @@
         </p:nvSpPr>
         <p:spPr>
           <a:xfrm>
-            <a:off x="5540833" y="3091597"/>
-            <a:ext cx="567784" cy="1015663"/>
-          </a:xfrm>
-          <a:prstGeom prst="rect">
-            <a:avLst/>
-          </a:prstGeom>
-          <a:noFill/>
-        </p:spPr>
-        <p:txBody>
-          <a:bodyPr wrap="none" rtlCol="0">
-            <a:spAutoFit/>
-          </a:bodyPr>
-          <a:lstStyle/>
-          <a:p>
-            <a:r>
-              <a:rPr lang="hu-HU" sz="6000" b="1" dirty="0">
-                <a:hlinkClick r:id="rId5" action="ppaction://hlinksldjump"/>
-              </a:rPr>
-              <a:t>&lt;</a:t>
-            </a:r>
-            <a:endParaRPr lang="hu-HU" sz="6000" b="1" dirty="0"/>
-          </a:p>
-        </p:txBody>
-      </p:sp>
-      <p:sp>
-        <p:nvSpPr>
-          <p:cNvPr id="10" name="Szövegdoboz 9">
-            <a:extLst>
-              <a:ext uri="{FF2B5EF4-FFF2-40B4-BE49-F238E27FC236}">
-                <a16:creationId xmlns:a16="http://schemas.microsoft.com/office/drawing/2014/main" id="{4BDD6F70-2569-4836-B970-ADCA6F5D01A2}"/>
-              </a:ext>
-            </a:extLst>
-          </p:cNvPr>
-          <p:cNvSpPr txBox="1"/>
-          <p:nvPr/>
-        </p:nvSpPr>
-        <p:spPr>
-          <a:xfrm>
-            <a:off x="9421801" y="3922593"/>
-            <a:ext cx="848694" cy="369332"/>
-          </a:xfrm>
-          <a:prstGeom prst="rect">
-            <a:avLst/>
-          </a:prstGeom>
-          <a:noFill/>
-        </p:spPr>
-        <p:txBody>
-          <a:bodyPr wrap="none" rtlCol="0">
-            <a:spAutoFit/>
-          </a:bodyPr>
-          <a:lstStyle/>
-          <a:p>
-            <a:r>
-              <a:rPr lang="hu-HU" b="1" dirty="0"/>
-              <a:t>Logikai</a:t>
-            </a:r>
-          </a:p>
-        </p:txBody>
-      </p:sp>
-      <p:sp>
-        <p:nvSpPr>
-          <p:cNvPr id="11" name="Szövegdoboz 10">
-            <a:extLst>
-              <a:ext uri="{FF2B5EF4-FFF2-40B4-BE49-F238E27FC236}">
-                <a16:creationId xmlns:a16="http://schemas.microsoft.com/office/drawing/2014/main" id="{31D1F507-54E2-4083-AF63-10388B0C62D0}"/>
-              </a:ext>
-            </a:extLst>
-          </p:cNvPr>
-          <p:cNvSpPr txBox="1"/>
-          <p:nvPr/>
-        </p:nvSpPr>
-        <p:spPr>
-          <a:xfrm>
-            <a:off x="9315694" y="4257007"/>
+            <a:off x="9766106" y="3453175"/>
             <a:ext cx="1346021" cy="861774"/>
           </a:xfrm>
           <a:prstGeom prst="rect">
@@ -3798,12 +3869,9 @@
           <a:lstStyle/>
           <a:p>
             <a:r>
-              <a:rPr lang="hu-HU" sz="5000" b="1" dirty="0">
-                <a:hlinkClick r:id="rId6" action="ppaction://hlinksldjump"/>
-              </a:rPr>
+              <a:rPr lang="hu-HU" sz="5000" b="1" dirty="0"/>
               <a:t>&amp;&amp;</a:t>
             </a:r>
-            <a:endParaRPr lang="hu-HU" sz="5000" b="1" dirty="0"/>
           </a:p>
         </p:txBody>
       </p:sp>
@@ -4173,31 +4241,77 @@
           </a:p>
         </p:txBody>
       </p:sp>
-      <p:sp>
-        <p:nvSpPr>
-          <p:cNvPr id="3" name="Tartalom helye 2">
-            <a:extLst>
-              <a:ext uri="{FF2B5EF4-FFF2-40B4-BE49-F238E27FC236}">
-                <a16:creationId xmlns:a16="http://schemas.microsoft.com/office/drawing/2014/main" id="{96945A82-252B-4079-8066-CB03CBCC2AF7}"/>
-              </a:ext>
-            </a:extLst>
-          </p:cNvPr>
-          <p:cNvSpPr>
-            <a:spLocks noGrp="1"/>
-          </p:cNvSpPr>
+      <p:pic>
+        <p:nvPicPr>
+          <p:cNvPr id="5" name="Tartalom helye 4">
+            <a:extLst>
+              <a:ext uri="{FF2B5EF4-FFF2-40B4-BE49-F238E27FC236}">
+                <a16:creationId xmlns:a16="http://schemas.microsoft.com/office/drawing/2014/main" id="{6798C6E4-E861-45CC-9EE1-EBAB29503B97}"/>
+              </a:ext>
+            </a:extLst>
+          </p:cNvPr>
+          <p:cNvPicPr>
+            <a:picLocks noGrp="1" noChangeAspect="1"/>
+          </p:cNvPicPr>
           <p:nvPr>
             <p:ph idx="1"/>
           </p:nvPr>
-        </p:nvSpPr>
-        <p:spPr/>
-        <p:txBody>
-          <a:bodyPr/>
-          <a:lstStyle/>
-          <a:p>
-            <a:endParaRPr lang="hu-HU"/>
-          </a:p>
-        </p:txBody>
-      </p:sp>
+        </p:nvPicPr>
+        <p:blipFill>
+          <a:blip r:embed="rId2">
+            <a:extLst>
+              <a:ext uri="{28A0092B-C50C-407E-A947-70E740481C1C}">
+                <a14:useLocalDpi xmlns:a14="http://schemas.microsoft.com/office/drawing/2010/main" val="0"/>
+              </a:ext>
+            </a:extLst>
+          </a:blip>
+          <a:stretch>
+            <a:fillRect/>
+          </a:stretch>
+        </p:blipFill>
+        <p:spPr>
+          <a:xfrm>
+            <a:off x="4181626" y="1873536"/>
+            <a:ext cx="7300846" cy="1745018"/>
+          </a:xfrm>
+        </p:spPr>
+      </p:pic>
+      <p:pic>
+        <p:nvPicPr>
+          <p:cNvPr id="7" name="Kép 6">
+            <a:extLst>
+              <a:ext uri="{FF2B5EF4-FFF2-40B4-BE49-F238E27FC236}">
+                <a16:creationId xmlns:a16="http://schemas.microsoft.com/office/drawing/2014/main" id="{194E8483-7A71-4143-A3B7-7C1D19FAEA60}"/>
+              </a:ext>
+            </a:extLst>
+          </p:cNvPr>
+          <p:cNvPicPr>
+            <a:picLocks noChangeAspect="1"/>
+          </p:cNvPicPr>
+          <p:nvPr/>
+        </p:nvPicPr>
+        <p:blipFill>
+          <a:blip r:embed="rId3">
+            <a:extLst>
+              <a:ext uri="{28A0092B-C50C-407E-A947-70E740481C1C}">
+                <a14:useLocalDpi xmlns:a14="http://schemas.microsoft.com/office/drawing/2010/main" val="0"/>
+              </a:ext>
+            </a:extLst>
+          </a:blip>
+          <a:stretch>
+            <a:fillRect/>
+          </a:stretch>
+        </p:blipFill>
+        <p:spPr>
+          <a:xfrm>
+            <a:off x="717721" y="4301067"/>
+            <a:ext cx="7633638" cy="1671186"/>
+          </a:xfrm>
+          <a:prstGeom prst="rect">
+            <a:avLst/>
+          </a:prstGeom>
+        </p:spPr>
+      </p:pic>
     </p:spTree>
     <p:extLst>
       <p:ext uri="{BB962C8B-B14F-4D97-AF65-F5344CB8AC3E}">
@@ -4589,31 +4703,36 @@
           </a:p>
         </p:txBody>
       </p:sp>
-      <p:sp>
-        <p:nvSpPr>
-          <p:cNvPr id="3" name="Tartalom helye 2">
-            <a:extLst>
-              <a:ext uri="{FF2B5EF4-FFF2-40B4-BE49-F238E27FC236}">
-                <a16:creationId xmlns:a16="http://schemas.microsoft.com/office/drawing/2014/main" id="{BA26C0B7-B924-4EFB-9569-495DF7171B19}"/>
-              </a:ext>
-            </a:extLst>
-          </p:cNvPr>
-          <p:cNvSpPr>
-            <a:spLocks noGrp="1"/>
-          </p:cNvSpPr>
-          <p:nvPr>
-            <p:ph idx="1"/>
-          </p:nvPr>
-        </p:nvSpPr>
-        <p:spPr/>
-        <p:txBody>
-          <a:bodyPr/>
-          <a:lstStyle/>
-          <a:p>
-            <a:endParaRPr lang="hu-HU"/>
-          </a:p>
-        </p:txBody>
-      </p:sp>
+      <p:pic>
+        <p:nvPicPr>
+          <p:cNvPr id="17" name="Kép 16">
+            <a:extLst>
+              <a:ext uri="{FF2B5EF4-FFF2-40B4-BE49-F238E27FC236}">
+                <a16:creationId xmlns:a16="http://schemas.microsoft.com/office/drawing/2014/main" id="{270247B2-CB06-4C57-9477-B05146CBCD51}"/>
+              </a:ext>
+            </a:extLst>
+          </p:cNvPr>
+          <p:cNvPicPr>
+            <a:picLocks noChangeAspect="1"/>
+          </p:cNvPicPr>
+          <p:nvPr/>
+        </p:nvPicPr>
+        <p:blipFill>
+          <a:blip r:embed="rId2"/>
+          <a:stretch>
+            <a:fillRect/>
+          </a:stretch>
+        </p:blipFill>
+        <p:spPr>
+          <a:xfrm>
+            <a:off x="2342589" y="2336998"/>
+            <a:ext cx="7506822" cy="2184003"/>
+          </a:xfrm>
+          <a:prstGeom prst="rect">
+            <a:avLst/>
+          </a:prstGeom>
+        </p:spPr>
+      </p:pic>
     </p:spTree>
     <p:extLst>
       <p:ext uri="{BB962C8B-B14F-4D97-AF65-F5344CB8AC3E}">
@@ -4828,31 +4947,77 @@
           </a:p>
         </p:txBody>
       </p:sp>
-      <p:sp>
-        <p:nvSpPr>
-          <p:cNvPr id="3" name="Tartalom helye 2">
-            <a:extLst>
-              <a:ext uri="{FF2B5EF4-FFF2-40B4-BE49-F238E27FC236}">
-                <a16:creationId xmlns:a16="http://schemas.microsoft.com/office/drawing/2014/main" id="{8F61A0F1-08CE-4529-BCD1-C0B9A30F7464}"/>
-              </a:ext>
-            </a:extLst>
-          </p:cNvPr>
-          <p:cNvSpPr>
-            <a:spLocks noGrp="1"/>
-          </p:cNvSpPr>
+      <p:pic>
+        <p:nvPicPr>
+          <p:cNvPr id="5" name="Tartalom helye 4">
+            <a:extLst>
+              <a:ext uri="{FF2B5EF4-FFF2-40B4-BE49-F238E27FC236}">
+                <a16:creationId xmlns:a16="http://schemas.microsoft.com/office/drawing/2014/main" id="{94B8465A-B850-4B3A-8E19-A584FBA36A3D}"/>
+              </a:ext>
+            </a:extLst>
+          </p:cNvPr>
+          <p:cNvPicPr>
+            <a:picLocks noGrp="1" noChangeAspect="1"/>
+          </p:cNvPicPr>
           <p:nvPr>
             <p:ph idx="1"/>
           </p:nvPr>
-        </p:nvSpPr>
-        <p:spPr/>
-        <p:txBody>
-          <a:bodyPr/>
-          <a:lstStyle/>
-          <a:p>
-            <a:endParaRPr lang="hu-HU"/>
-          </a:p>
-        </p:txBody>
-      </p:sp>
+        </p:nvPicPr>
+        <p:blipFill>
+          <a:blip r:embed="rId2">
+            <a:extLst>
+              <a:ext uri="{28A0092B-C50C-407E-A947-70E740481C1C}">
+                <a14:useLocalDpi xmlns:a14="http://schemas.microsoft.com/office/drawing/2010/main" val="0"/>
+              </a:ext>
+            </a:extLst>
+          </a:blip>
+          <a:stretch>
+            <a:fillRect/>
+          </a:stretch>
+        </p:blipFill>
+        <p:spPr>
+          <a:xfrm>
+            <a:off x="5272263" y="1973399"/>
+            <a:ext cx="6013804" cy="1593883"/>
+          </a:xfrm>
+        </p:spPr>
+      </p:pic>
+      <p:pic>
+        <p:nvPicPr>
+          <p:cNvPr id="7" name="Kép 6">
+            <a:extLst>
+              <a:ext uri="{FF2B5EF4-FFF2-40B4-BE49-F238E27FC236}">
+                <a16:creationId xmlns:a16="http://schemas.microsoft.com/office/drawing/2014/main" id="{6957E080-6969-442A-AB08-E111A82C14E6}"/>
+              </a:ext>
+            </a:extLst>
+          </p:cNvPr>
+          <p:cNvPicPr>
+            <a:picLocks noChangeAspect="1"/>
+          </p:cNvPicPr>
+          <p:nvPr/>
+        </p:nvPicPr>
+        <p:blipFill>
+          <a:blip r:embed="rId3">
+            <a:extLst>
+              <a:ext uri="{28A0092B-C50C-407E-A947-70E740481C1C}">
+                <a14:useLocalDpi xmlns:a14="http://schemas.microsoft.com/office/drawing/2010/main" val="0"/>
+              </a:ext>
+            </a:extLst>
+          </a:blip>
+          <a:stretch>
+            <a:fillRect/>
+          </a:stretch>
+        </p:blipFill>
+        <p:spPr>
+          <a:xfrm>
+            <a:off x="1115161" y="4233334"/>
+            <a:ext cx="7555761" cy="1498664"/>
+          </a:xfrm>
+          <a:prstGeom prst="rect">
+            <a:avLst/>
+          </a:prstGeom>
+        </p:spPr>
+      </p:pic>
     </p:spTree>
     <p:extLst>
       <p:ext uri="{BB962C8B-B14F-4D97-AF65-F5344CB8AC3E}">
